--- a/templates/sidebar_executive.pptx
+++ b/templates/sidebar_executive.pptx
@@ -3174,14 +3174,14 @@
         </p:nvSpPr>
         <p:spPr>
           <a:xfrm>
-            <a:off x="731520" y="1645920"/>
-            <a:ext cx="109728" cy="3657600"/>
+            <a:off x="0" y="0"/>
+            <a:ext cx="2286000" cy="6858000"/>
           </a:xfrm>
           <a:prstGeom prst="rect">
             <a:avLst/>
           </a:prstGeom>
           <a:solidFill>
-            <a:srgbClr val="6366F1"/>
+            <a:srgbClr val="2563EB"/>
           </a:solidFill>
           <a:ln>
             <a:noFill/>
@@ -3217,8 +3217,8 @@
         </p:nvSpPr>
         <p:spPr>
           <a:xfrm>
-            <a:off x="731520" y="731520"/>
-            <a:ext cx="3657600" cy="548640"/>
+            <a:off x="2743200" y="2011680"/>
+            <a:ext cx="8686800" cy="1828800"/>
           </a:xfrm>
           <a:prstGeom prst="rect">
             <a:avLst/>
@@ -3232,84 +3232,14 @@
           <a:lstStyle/>
           <a:p>
             <a:pPr>
-              <a:defRPr sz="1400" b="1">
+              <a:defRPr sz="4400" b="1">
                 <a:solidFill>
-                  <a:srgbClr val="6366F1"/>
+                  <a:srgbClr val="0F172A"/>
                 </a:solidFill>
               </a:defRPr>
             </a:pPr>
             <a:r>
-              <a:t>MOTHER AI</a:t>
-            </a:r>
-          </a:p>
-        </p:txBody>
-      </p:sp>
-      <p:sp>
-        <p:nvSpPr>
-          <p:cNvPr id="7" name="TextBox 6"/>
-          <p:cNvSpPr txBox="1"/>
-          <p:nvPr/>
-        </p:nvSpPr>
-        <p:spPr>
-          <a:xfrm>
-            <a:off x="1097280" y="1828800"/>
-            <a:ext cx="10058400" cy="1645920"/>
-          </a:xfrm>
-          <a:prstGeom prst="rect">
-            <a:avLst/>
-          </a:prstGeom>
-          <a:noFill/>
-        </p:spPr>
-        <p:txBody>
-          <a:bodyPr wrap="none">
-            <a:spAutoFit/>
-          </a:bodyPr>
-          <a:lstStyle/>
-          <a:p>
-            <a:pPr>
-              <a:defRPr sz="4400" b="1">
-                <a:solidFill>
-                  <a:srgbClr val="F1F5F9"/>
-                </a:solidFill>
-              </a:defRPr>
-            </a:pPr>
-            <a:r>
-              <a:t>Sidebar Executive Slate Cover</a:t>
-            </a:r>
-          </a:p>
-        </p:txBody>
-      </p:sp>
-      <p:sp>
-        <p:nvSpPr>
-          <p:cNvPr id="8" name="TextBox 7"/>
-          <p:cNvSpPr txBox="1"/>
-          <p:nvPr/>
-        </p:nvSpPr>
-        <p:spPr>
-          <a:xfrm>
-            <a:off x="1097280" y="3657600"/>
-            <a:ext cx="10058400" cy="1097280"/>
-          </a:xfrm>
-          <a:prstGeom prst="rect">
-            <a:avLst/>
-          </a:prstGeom>
-          <a:noFill/>
-        </p:spPr>
-        <p:txBody>
-          <a:bodyPr wrap="none">
-            <a:spAutoFit/>
-          </a:bodyPr>
-          <a:lstStyle/>
-          <a:p>
-            <a:pPr>
-              <a:defRPr sz="2200">
-                <a:solidFill>
-                  <a:srgbClr val="0D9488"/>
-                </a:solidFill>
-              </a:defRPr>
-            </a:pPr>
-            <a:r>
-              <a:t>Predefined Slide Master Template</a:t>
+              <a:t>Executive Sidebar Rail</a:t>
             </a:r>
           </a:p>
         </p:txBody>
@@ -3375,13 +3305,13 @@
         <p:spPr>
           <a:xfrm>
             <a:off x="0" y="0"/>
-            <a:ext cx="12191695" cy="73152"/>
+            <a:ext cx="12191695" cy="6858000"/>
           </a:xfrm>
           <a:prstGeom prst="rect">
             <a:avLst/>
           </a:prstGeom>
           <a:solidFill>
-            <a:srgbClr val="6366F1"/>
+            <a:srgbClr val="F8FAFC"/>
           </a:solidFill>
           <a:ln>
             <a:noFill/>
@@ -3411,14 +3341,57 @@
       </p:sp>
       <p:sp>
         <p:nvSpPr>
-          <p:cNvPr id="5" name="TextBox 4"/>
+          <p:cNvPr id="5" name="Rectangle 4"/>
+          <p:cNvSpPr/>
+          <p:nvPr/>
+        </p:nvSpPr>
+        <p:spPr>
+          <a:xfrm>
+            <a:off x="0" y="0"/>
+            <a:ext cx="2286000" cy="6858000"/>
+          </a:xfrm>
+          <a:prstGeom prst="rect">
+            <a:avLst/>
+          </a:prstGeom>
+          <a:solidFill>
+            <a:srgbClr val="0F172A"/>
+          </a:solidFill>
+          <a:ln>
+            <a:noFill/>
+          </a:ln>
+        </p:spPr>
+        <p:style>
+          <a:lnRef idx="1">
+            <a:schemeClr val="accent1"/>
+          </a:lnRef>
+          <a:fillRef idx="3">
+            <a:schemeClr val="accent1"/>
+          </a:fillRef>
+          <a:effectRef idx="2">
+            <a:schemeClr val="accent1"/>
+          </a:effectRef>
+          <a:fontRef idx="minor">
+            <a:schemeClr val="lt1"/>
+          </a:fontRef>
+        </p:style>
+        <p:txBody>
+          <a:bodyPr rtlCol="0" anchor="ctr"/>
+          <a:lstStyle/>
+          <a:p>
+            <a:pPr algn="ctr"/>
+          </a:p>
+        </p:txBody>
+      </p:sp>
+      <p:sp>
+        <p:nvSpPr>
+          <p:cNvPr id="6" name="TextBox 5"/>
           <p:cNvSpPr txBox="1"/>
           <p:nvPr/>
         </p:nvSpPr>
         <p:spPr>
           <a:xfrm>
-            <a:off x="731520" y="320040"/>
-            <a:ext cx="8686800" cy="731520"/>
+            <a:off x="365760" y="365760"/>
+            <a:ext cx="1645920" cy="457200"/>
           </a:xfrm>
           <a:prstGeom prst="rect">
             <a:avLst/>
@@ -3432,38 +3405,38 @@
           <a:lstStyle/>
           <a:p>
             <a:pPr>
-              <a:defRPr sz="2800" b="1">
+              <a:defRPr sz="1200" b="1">
                 <a:solidFill>
-                  <a:srgbClr val="FFFFFF"/>
+                  <a:srgbClr val="2563EB"/>
                 </a:solidFill>
               </a:defRPr>
             </a:pPr>
             <a:r>
-              <a:t>Slide Header Title</a:t>
-            </a:r>
-          </a:p>
-        </p:txBody>
-      </p:sp>
-      <p:sp>
-        <p:nvSpPr>
-          <p:cNvPr id="6" name="Rounded Rectangle 5"/>
+              <a:t>MOTHER AI</a:t>
+            </a:r>
+          </a:p>
+        </p:txBody>
+      </p:sp>
+      <p:sp>
+        <p:nvSpPr>
+          <p:cNvPr id="7" name="Rounded Rectangle 6"/>
           <p:cNvSpPr/>
           <p:nvPr/>
         </p:nvSpPr>
         <p:spPr>
           <a:xfrm>
-            <a:off x="731520" y="1188720"/>
-            <a:ext cx="10728655" cy="4846320"/>
+            <a:off x="2560320" y="1188720"/>
+            <a:ext cx="8961120" cy="5029200"/>
           </a:xfrm>
           <a:prstGeom prst="roundRect">
             <a:avLst/>
           </a:prstGeom>
           <a:solidFill>
-            <a:srgbClr val="1E293B"/>
+            <a:srgbClr val="FFFFFF"/>
           </a:solidFill>
-          <a:ln w="12700">
+          <a:ln>
             <a:solidFill>
-              <a:srgbClr val="334155"/>
+              <a:srgbClr val="E2E8F0"/>
             </a:solidFill>
           </a:ln>
         </p:spPr>
